--- a/dist/초2/수학/수와계산/초2_수학_수와계산_10_7단과9단.pptx
+++ b/dist/초2/수학/수와계산/초2_수학_수와계산_10_7단과9단.pptx
@@ -122,13 +122,13 @@
   <p:extLst>
     <p:ext uri="{521415D9-36F7-43E2-AB2F-B90AF26B5E84}">
       <p14:sectionLst xmlns:p14="http://schemas.microsoft.com/office/powerpoint/2010/main">
-        <p14:section name="도입" id="{1d282b7d-8138-ed22-a762-b8fb083b78b1}">
+        <p14:section name="도입" id="{2b762ebd-30b4-7187-3a0e-c290712bb852}">
           <p14:sldIdLst>
             <p14:sldId id="256"/>
             <p14:sldId id="257"/>
           </p14:sldIdLst>
         </p14:section>
-        <p14:section name="개념" id="{93c3db3c-b251-e136-f6ae-413ce3d9e9e0}">
+        <p14:section name="개념" id="{f46ac7d4-21ea-dea5-bb75-b5801e7006ee}">
           <p14:sldIdLst>
             <p14:sldId id="258"/>
             <p14:sldId id="259"/>
@@ -138,26 +138,26 @@
             <p14:sldId id="263"/>
           </p14:sldIdLst>
         </p14:section>
-        <p14:section name="연습" id="{0aff3d0c-58b5-d261-eb5b-df87e16fa9d1}">
+        <p14:section name="연습" id="{60cbe34d-af2e-9768-d61c-224430de4dfb}">
           <p14:sldIdLst>
             <p14:sldId id="264"/>
             <p14:sldId id="265"/>
             <p14:sldId id="266"/>
           </p14:sldIdLst>
         </p14:section>
-        <p14:section name="확인" id="{0a8627e2-0053-a4de-a0cf-5bb3be336d7f}">
+        <p14:section name="확인" id="{60cb3ef7-56c3-8835-dc75-9d40767d636b}">
           <p14:sldIdLst>
             <p14:sldId id="267"/>
             <p14:sldId id="268"/>
             <p14:sldId id="269"/>
           </p14:sldIdLst>
         </p14:section>
-        <p14:section name="정리" id="{453d625b-de94-5640-a46c-e71322106f7c}">
+        <p14:section name="정리" id="{f4899dd2-c1d1-7966-cc30-a3ca8eaab65f}">
           <p14:sldIdLst>
             <p14:sldId id="270"/>
           </p14:sldIdLst>
         </p14:section>
-        <p14:section name="보충" id="{d5e80f42-5754-afcb-c28d-c1201f4718fd}">
+        <p14:section name="보충" id="{ce88da5f-16f6-4769-6f34-11a2310cf03c}">
           <p14:sldIdLst>
             <p14:sldId id="271"/>
           </p14:sldIdLst>
@@ -871,7 +871,7 @@
               <a:rPr lang="en-US" dirty="0"/>
               <a:t>[S12 · 혼자 해결]
 목적: 도움 없이 7단·9단의 곱을 구하고, 생활 문제를 곱셈식으로 풀 수 있는지 확인합니다.
-시간: 약 5분
+시간: 약 4분
 이렇게 말해 보세요
 - “이번에는 혼자 해 볼래? ③, ④는 곱셈식을 종이에 쓰고 답을 말해 줘.”
 - “①이나 ② 중 하나는 어떻게 구했는지 설명해 줘.”
@@ -1578,7 +1578,7 @@
               <a:rPr lang="en-US" dirty="0"/>
               <a:t>[S04 · 7씩 묶음 = 5씩 묶음 + 2씩 묶음(점 배열)]
 목적: 점 배열로 ‘7씩 4묶음’이 ‘5씩 4묶음’과 ‘2씩 4묶음’을 합친 것임을 보고, 아는 5단·2단으로 7단의 곱을 구합니다.
-시간: 약 4분
+시간: 약 3분
 이렇게 말해 보세요
 - “주황 점은 5씩 몇 묶음이야? 파란 점은 2씩 4묶음이지? 둘을 옆으로 붙이면 한 줄에 몇 개야?”
 - “5 × 4는 20, 2 × 4는 8이야. 둘을 더하면 7 × 4가 돼. 얼마야?”

--- a/dist/초2/수학/수와계산/초2_수학_수와계산_10_7단과9단.pptx
+++ b/dist/초2/수학/수와계산/초2_수학_수와계산_10_7단과9단.pptx
@@ -122,13 +122,13 @@
   <p:extLst>
     <p:ext uri="{521415D9-36F7-43E2-AB2F-B90AF26B5E84}">
       <p14:sectionLst xmlns:p14="http://schemas.microsoft.com/office/powerpoint/2010/main">
-        <p14:section name="도입" id="{2b762ebd-30b4-7187-3a0e-c290712bb852}">
+        <p14:section name="도입" id="{a20f1bfe-7b95-3f9d-f7d9-ec32fa1de90a}">
           <p14:sldIdLst>
             <p14:sldId id="256"/>
             <p14:sldId id="257"/>
           </p14:sldIdLst>
         </p14:section>
-        <p14:section name="개념" id="{f46ac7d4-21ea-dea5-bb75-b5801e7006ee}">
+        <p14:section name="개념" id="{10beab1f-7763-f416-34d4-cb8271686d9a}">
           <p14:sldIdLst>
             <p14:sldId id="258"/>
             <p14:sldId id="259"/>
@@ -138,26 +138,26 @@
             <p14:sldId id="263"/>
           </p14:sldIdLst>
         </p14:section>
-        <p14:section name="연습" id="{60cbe34d-af2e-9768-d61c-224430de4dfb}">
+        <p14:section name="연습" id="{3ea5237b-18cb-82c8-215d-65d50987399f}">
           <p14:sldIdLst>
             <p14:sldId id="264"/>
             <p14:sldId id="265"/>
             <p14:sldId id="266"/>
           </p14:sldIdLst>
         </p14:section>
-        <p14:section name="확인" id="{60cb3ef7-56c3-8835-dc75-9d40767d636b}">
+        <p14:section name="확인" id="{f28d5db8-3d07-3bef-96ab-c632e9d3d379}">
           <p14:sldIdLst>
             <p14:sldId id="267"/>
             <p14:sldId id="268"/>
             <p14:sldId id="269"/>
           </p14:sldIdLst>
         </p14:section>
-        <p14:section name="정리" id="{f4899dd2-c1d1-7966-cc30-a3ca8eaab65f}">
+        <p14:section name="정리" id="{a8316744-a844-8241-0d5c-49d13af16ff4}">
           <p14:sldIdLst>
             <p14:sldId id="270"/>
           </p14:sldIdLst>
         </p14:section>
-        <p14:section name="보충" id="{ce88da5f-16f6-4769-6f34-11a2310cf03c}">
+        <p14:section name="보충" id="{6449ecf5-1191-2c73-7c1d-fe5fe63b9339}">
           <p14:sldIdLst>
             <p14:sldId id="271"/>
           </p14:sldIdLst>
@@ -13714,7 +13714,7 @@
           </p:nvPr>
         </p:nvGraphicFramePr>
         <p:xfrm>
-          <a:off x="548640" y="2509520"/>
+          <a:off x="548640" y="2542540"/>
           <a:ext cx="11091672" cy="914400"/>
         </p:xfrm>
         <a:graphic>
@@ -13733,7 +13733,7 @@
                 <a:gridCol w="1109167"/>
                 <a:gridCol w="1109167"/>
               </a:tblGrid>
-              <a:tr h="528320">
+              <a:tr h="511810">
                 <a:tc>
                   <a:txBody>
                     <a:bodyPr/>
@@ -14415,7 +14415,7 @@
                   </a:tcPr>
                 </a:tc>
               </a:tr>
-              <a:tr h="528320">
+              <a:tr h="511810">
                 <a:tc>
                   <a:txBody>
                     <a:bodyPr/>
@@ -15097,7 +15097,7 @@
                   </a:tcPr>
                 </a:tc>
               </a:tr>
-              <a:tr h="528320">
+              <a:tr h="511810">
                 <a:tc>
                   <a:txBody>
                     <a:bodyPr/>
@@ -15779,7 +15779,7 @@
                   </a:tcPr>
                 </a:tc>
               </a:tr>
-              <a:tr h="528320">
+              <a:tr h="511810">
                 <a:tc>
                   <a:txBody>
                     <a:bodyPr/>
@@ -19961,7 +19961,7 @@
           </p:nvPr>
         </p:nvGraphicFramePr>
         <p:xfrm>
-          <a:off x="548640" y="3037840"/>
+          <a:off x="548640" y="3054350"/>
           <a:ext cx="11091672" cy="914400"/>
         </p:xfrm>
         <a:graphic>
@@ -19979,7 +19979,7 @@
                 <a:gridCol w="1232408"/>
                 <a:gridCol w="1232408"/>
               </a:tblGrid>
-              <a:tr h="528320">
+              <a:tr h="511810">
                 <a:tc>
                   <a:txBody>
                     <a:bodyPr/>
@@ -20593,7 +20593,7 @@
                   </a:tcPr>
                 </a:tc>
               </a:tr>
-              <a:tr h="528320">
+              <a:tr h="511810">
                 <a:tc>
                   <a:txBody>
                     <a:bodyPr/>
